--- a/examples/ppt/transitions/transitions-morph.pptx
+++ b/examples/ppt/transitions/transitions-morph.pptx
@@ -5,10 +5,10 @@
     <p:sldMasterId xmlns:r="http://schemas.openxmlformats.org/officeDocument/2006/relationships" id="2147483648" r:id="rId1"/>
   </p:sldMasterIdLst>
   <p:sldIdLst>
-    <p:sldId id="256" r:id="Rfd02471a46e84fc6"/>
-    <p:sldId id="257" r:id="Rda4e08c9f5024eaa"/>
-    <p:sldId id="258" r:id="Rbbf1745752184d11"/>
-    <p:sldId id="259" r:id="Rf77aaaccf174467c"/>
+    <p:sldId id="256" r:id="Rc799d5a32c514349"/>
+    <p:sldId id="257" r:id="R59bd2c330e464cc6"/>
+    <p:sldId id="258" r:id="R60de14f39b394e99"/>
+    <p:sldId id="259" r:id="R28d327a86f9e46bd"/>
   </p:sldIdLst>
   <p:sldSz cx="12192000" cy="6858000"/>
   <p:notesSz cx="6858000" cy="9144000"/>
@@ -283,7 +283,7 @@
 </file>
 
 <file path=ppt/slideMasters/slideMaster1.xml><?xml version="1.0" encoding="utf-8"?>
-<p:sldMaster xmlns:p="http://schemas.openxmlformats.org/presentationml/2006/main">
+<p:sldMaster xmlns:r="http://schemas.openxmlformats.org/officeDocument/2006/relationships" xmlns:p="http://schemas.openxmlformats.org/presentationml/2006/main">
   <p:cSld>
     <p:spTree>
       <p:nvGrpSpPr>
@@ -317,7 +317,7 @@
       <p:grpSpPr/>
       <p:sp>
         <p:nvSpPr>
-          <p:cNvPr id="10000" name="TextBox 1"/>
+          <p:cNvPr id="100000" name="TextBox 1"/>
           <p:cNvSpPr/>
           <p:nvPr/>
         </p:nvSpPr>
@@ -336,17 +336,12 @@
         <p:txBody>
           <a:bodyPr xmlns:a="http://schemas.openxmlformats.org/drawingml/2006/main"/>
           <a:lstStyle xmlns:a="http://schemas.openxmlformats.org/drawingml/2006/main"/>
-          <a:p xmlns:a="http://schemas.openxmlformats.org/drawingml/2006/main">
-            <a:r>
-              <a:rPr lang="en-US"/>
-              <a:t/>
-            </a:r>
-          </a:p>
-        </p:txBody>
-      </p:sp>
-      <p:sp>
-        <p:nvSpPr>
-          <p:cNvPr id="10001" name="TextBox 2"/>
+          <a:p xmlns:a="http://schemas.openxmlformats.org/drawingml/2006/main"/>
+        </p:txBody>
+      </p:sp>
+      <p:sp>
+        <p:nvSpPr>
+          <p:cNvPr id="100001" name="TextBox 2"/>
           <p:cNvSpPr txBox="1"/>
           <p:nvPr/>
         </p:nvSpPr>
@@ -377,7 +372,7 @@
       </p:sp>
       <p:sp>
         <p:nvSpPr>
-          <p:cNvPr id="10002" name="!!morphBall"/>
+          <p:cNvPr id="100002" name="!!morphBall"/>
           <p:cNvSpPr/>
           <p:nvPr/>
         </p:nvSpPr>
@@ -396,12 +391,7 @@
         <p:txBody>
           <a:bodyPr xmlns:a="http://schemas.openxmlformats.org/drawingml/2006/main"/>
           <a:lstStyle xmlns:a="http://schemas.openxmlformats.org/drawingml/2006/main"/>
-          <a:p xmlns:a="http://schemas.openxmlformats.org/drawingml/2006/main">
-            <a:r>
-              <a:rPr lang="en-US"/>
-              <a:t/>
-            </a:r>
-          </a:p>
+          <a:p xmlns:a="http://schemas.openxmlformats.org/drawingml/2006/main"/>
         </p:txBody>
       </p:sp>
     </p:spTree>
@@ -421,7 +411,7 @@
       <p:grpSpPr/>
       <p:sp>
         <p:nvSpPr>
-          <p:cNvPr id="10003" name="TextBox 1"/>
+          <p:cNvPr id="100003" name="TextBox 1"/>
           <p:cNvSpPr/>
           <p:nvPr/>
         </p:nvSpPr>
@@ -440,17 +430,12 @@
         <p:txBody>
           <a:bodyPr xmlns:a="http://schemas.openxmlformats.org/drawingml/2006/main"/>
           <a:lstStyle xmlns:a="http://schemas.openxmlformats.org/drawingml/2006/main"/>
-          <a:p xmlns:a="http://schemas.openxmlformats.org/drawingml/2006/main">
-            <a:r>
-              <a:rPr lang="en-US"/>
-              <a:t/>
-            </a:r>
-          </a:p>
-        </p:txBody>
-      </p:sp>
-      <p:sp>
-        <p:nvSpPr>
-          <p:cNvPr id="10004" name="TextBox 2"/>
+          <a:p xmlns:a="http://schemas.openxmlformats.org/drawingml/2006/main"/>
+        </p:txBody>
+      </p:sp>
+      <p:sp>
+        <p:nvSpPr>
+          <p:cNvPr id="100004" name="TextBox 2"/>
           <p:cNvSpPr txBox="1"/>
           <p:nvPr/>
         </p:nvSpPr>
@@ -481,7 +466,7 @@
       </p:sp>
       <p:sp>
         <p:nvSpPr>
-          <p:cNvPr id="10005" name="!!morphBall"/>
+          <p:cNvPr id="100005" name="!!morphBall"/>
           <p:cNvSpPr/>
           <p:nvPr/>
         </p:nvSpPr>
@@ -500,12 +485,7 @@
         <p:txBody>
           <a:bodyPr xmlns:a="http://schemas.openxmlformats.org/drawingml/2006/main"/>
           <a:lstStyle xmlns:a="http://schemas.openxmlformats.org/drawingml/2006/main"/>
-          <a:p xmlns:a="http://schemas.openxmlformats.org/drawingml/2006/main">
-            <a:r>
-              <a:rPr lang="en-US"/>
-              <a:t/>
-            </a:r>
-          </a:p>
+          <a:p xmlns:a="http://schemas.openxmlformats.org/drawingml/2006/main"/>
         </p:txBody>
       </p:sp>
     </p:spTree>
@@ -537,7 +517,7 @@
       <p:grpSpPr/>
       <p:sp>
         <p:nvSpPr>
-          <p:cNvPr id="10006" name="TextBox 1"/>
+          <p:cNvPr id="100006" name="TextBox 1"/>
           <p:cNvSpPr/>
           <p:nvPr/>
         </p:nvSpPr>
@@ -556,17 +536,12 @@
         <p:txBody>
           <a:bodyPr xmlns:a="http://schemas.openxmlformats.org/drawingml/2006/main"/>
           <a:lstStyle xmlns:a="http://schemas.openxmlformats.org/drawingml/2006/main"/>
-          <a:p xmlns:a="http://schemas.openxmlformats.org/drawingml/2006/main">
-            <a:r>
-              <a:rPr lang="en-US"/>
-              <a:t/>
-            </a:r>
-          </a:p>
-        </p:txBody>
-      </p:sp>
-      <p:sp>
-        <p:nvSpPr>
-          <p:cNvPr id="10007" name="TextBox 2"/>
+          <a:p xmlns:a="http://schemas.openxmlformats.org/drawingml/2006/main"/>
+        </p:txBody>
+      </p:sp>
+      <p:sp>
+        <p:nvSpPr>
+          <p:cNvPr id="100007" name="TextBox 2"/>
           <p:cNvSpPr txBox="1"/>
           <p:nvPr/>
         </p:nvSpPr>
@@ -597,7 +572,7 @@
       </p:sp>
       <p:sp>
         <p:nvSpPr>
-          <p:cNvPr id="10008" name="!!morphBall"/>
+          <p:cNvPr id="100008" name="!!morphBall"/>
           <p:cNvSpPr/>
           <p:nvPr/>
         </p:nvSpPr>
@@ -616,12 +591,7 @@
         <p:txBody>
           <a:bodyPr xmlns:a="http://schemas.openxmlformats.org/drawingml/2006/main"/>
           <a:lstStyle xmlns:a="http://schemas.openxmlformats.org/drawingml/2006/main"/>
-          <a:p xmlns:a="http://schemas.openxmlformats.org/drawingml/2006/main">
-            <a:r>
-              <a:rPr lang="en-US"/>
-              <a:t/>
-            </a:r>
-          </a:p>
+          <a:p xmlns:a="http://schemas.openxmlformats.org/drawingml/2006/main"/>
         </p:txBody>
       </p:sp>
     </p:spTree>
@@ -653,7 +623,7 @@
       <p:grpSpPr/>
       <p:sp>
         <p:nvSpPr>
-          <p:cNvPr id="10009" name="TextBox 1"/>
+          <p:cNvPr id="100009" name="TextBox 1"/>
           <p:cNvSpPr/>
           <p:nvPr/>
         </p:nvSpPr>
@@ -672,17 +642,12 @@
         <p:txBody>
           <a:bodyPr xmlns:a="http://schemas.openxmlformats.org/drawingml/2006/main"/>
           <a:lstStyle xmlns:a="http://schemas.openxmlformats.org/drawingml/2006/main"/>
-          <a:p xmlns:a="http://schemas.openxmlformats.org/drawingml/2006/main">
-            <a:r>
-              <a:rPr lang="en-US"/>
-              <a:t/>
-            </a:r>
-          </a:p>
-        </p:txBody>
-      </p:sp>
-      <p:sp>
-        <p:nvSpPr>
-          <p:cNvPr id="10010" name="TextBox 2"/>
+          <a:p xmlns:a="http://schemas.openxmlformats.org/drawingml/2006/main"/>
+        </p:txBody>
+      </p:sp>
+      <p:sp>
+        <p:nvSpPr>
+          <p:cNvPr id="100010" name="TextBox 2"/>
           <p:cNvSpPr txBox="1"/>
           <p:nvPr/>
         </p:nvSpPr>
@@ -713,7 +678,7 @@
       </p:sp>
       <p:sp>
         <p:nvSpPr>
-          <p:cNvPr id="10011" name="!!morphBall"/>
+          <p:cNvPr id="100011" name="!!morphBall"/>
           <p:cNvSpPr/>
           <p:nvPr/>
         </p:nvSpPr>
@@ -732,12 +697,7 @@
         <p:txBody>
           <a:bodyPr xmlns:a="http://schemas.openxmlformats.org/drawingml/2006/main"/>
           <a:lstStyle xmlns:a="http://schemas.openxmlformats.org/drawingml/2006/main"/>
-          <a:p xmlns:a="http://schemas.openxmlformats.org/drawingml/2006/main">
-            <a:r>
-              <a:rPr lang="en-US"/>
-              <a:t/>
-            </a:r>
-          </a:p>
+          <a:p xmlns:a="http://schemas.openxmlformats.org/drawingml/2006/main"/>
         </p:txBody>
       </p:sp>
     </p:spTree>
